--- a/ゲーム科1年/00_前期/ゲームプログラミングⅠ/04_画像処理.pptx
+++ b/ゲーム科1年/00_前期/ゲームプログラミングⅠ/04_画像処理.pptx
@@ -273,7 +273,7 @@
           <a:p>
             <a:fld id="{E9CC885B-4903-4D54-9A93-00025F12DED9}" type="datetimeFigureOut">
               <a:rPr kumimoji="1" lang="ja-JP" altLang="en-US" smtClean="0"/>
-              <a:t>2024/9/4</a:t>
+              <a:t>2025/1/6</a:t>
             </a:fld>
             <a:endParaRPr kumimoji="1" lang="ja-JP" altLang="en-US"/>
           </a:p>
@@ -503,7 +503,7 @@
           <a:p>
             <a:fld id="{E9CC885B-4903-4D54-9A93-00025F12DED9}" type="datetimeFigureOut">
               <a:rPr kumimoji="1" lang="ja-JP" altLang="en-US" smtClean="0"/>
-              <a:t>2024/9/4</a:t>
+              <a:t>2025/1/6</a:t>
             </a:fld>
             <a:endParaRPr kumimoji="1" lang="ja-JP" altLang="en-US"/>
           </a:p>
@@ -743,7 +743,7 @@
           <a:p>
             <a:fld id="{E9CC885B-4903-4D54-9A93-00025F12DED9}" type="datetimeFigureOut">
               <a:rPr kumimoji="1" lang="ja-JP" altLang="en-US" smtClean="0"/>
-              <a:t>2024/9/4</a:t>
+              <a:t>2025/1/6</a:t>
             </a:fld>
             <a:endParaRPr kumimoji="1" lang="ja-JP" altLang="en-US"/>
           </a:p>
@@ -973,7 +973,7 @@
           <a:p>
             <a:fld id="{E9CC885B-4903-4D54-9A93-00025F12DED9}" type="datetimeFigureOut">
               <a:rPr kumimoji="1" lang="ja-JP" altLang="en-US" smtClean="0"/>
-              <a:t>2024/9/4</a:t>
+              <a:t>2025/1/6</a:t>
             </a:fld>
             <a:endParaRPr kumimoji="1" lang="ja-JP" altLang="en-US"/>
           </a:p>
@@ -1248,7 +1248,7 @@
           <a:p>
             <a:fld id="{E9CC885B-4903-4D54-9A93-00025F12DED9}" type="datetimeFigureOut">
               <a:rPr kumimoji="1" lang="ja-JP" altLang="en-US" smtClean="0"/>
-              <a:t>2024/9/4</a:t>
+              <a:t>2025/1/6</a:t>
             </a:fld>
             <a:endParaRPr kumimoji="1" lang="ja-JP" altLang="en-US"/>
           </a:p>
@@ -1577,7 +1577,7 @@
           <a:p>
             <a:fld id="{E9CC885B-4903-4D54-9A93-00025F12DED9}" type="datetimeFigureOut">
               <a:rPr kumimoji="1" lang="ja-JP" altLang="en-US" smtClean="0"/>
-              <a:t>2024/9/4</a:t>
+              <a:t>2025/1/6</a:t>
             </a:fld>
             <a:endParaRPr kumimoji="1" lang="ja-JP" altLang="en-US"/>
           </a:p>
@@ -2053,7 +2053,7 @@
           <a:p>
             <a:fld id="{E9CC885B-4903-4D54-9A93-00025F12DED9}" type="datetimeFigureOut">
               <a:rPr kumimoji="1" lang="ja-JP" altLang="en-US" smtClean="0"/>
-              <a:t>2024/9/4</a:t>
+              <a:t>2025/1/6</a:t>
             </a:fld>
             <a:endParaRPr kumimoji="1" lang="ja-JP" altLang="en-US"/>
           </a:p>
@@ -2194,7 +2194,7 @@
           <a:p>
             <a:fld id="{E9CC885B-4903-4D54-9A93-00025F12DED9}" type="datetimeFigureOut">
               <a:rPr kumimoji="1" lang="ja-JP" altLang="en-US" smtClean="0"/>
-              <a:t>2024/9/4</a:t>
+              <a:t>2025/1/6</a:t>
             </a:fld>
             <a:endParaRPr kumimoji="1" lang="ja-JP" altLang="en-US"/>
           </a:p>
@@ -2307,7 +2307,7 @@
           <a:p>
             <a:fld id="{E9CC885B-4903-4D54-9A93-00025F12DED9}" type="datetimeFigureOut">
               <a:rPr kumimoji="1" lang="ja-JP" altLang="en-US" smtClean="0"/>
-              <a:t>2024/9/4</a:t>
+              <a:t>2025/1/6</a:t>
             </a:fld>
             <a:endParaRPr kumimoji="1" lang="ja-JP" altLang="en-US"/>
           </a:p>
@@ -2650,7 +2650,7 @@
           <a:p>
             <a:fld id="{E9CC885B-4903-4D54-9A93-00025F12DED9}" type="datetimeFigureOut">
               <a:rPr kumimoji="1" lang="ja-JP" altLang="en-US" smtClean="0"/>
-              <a:t>2024/9/4</a:t>
+              <a:t>2025/1/6</a:t>
             </a:fld>
             <a:endParaRPr kumimoji="1" lang="ja-JP" altLang="en-US"/>
           </a:p>
@@ -2938,7 +2938,7 @@
           <a:p>
             <a:fld id="{E9CC885B-4903-4D54-9A93-00025F12DED9}" type="datetimeFigureOut">
               <a:rPr kumimoji="1" lang="ja-JP" altLang="en-US" smtClean="0"/>
-              <a:t>2024/9/4</a:t>
+              <a:t>2025/1/6</a:t>
             </a:fld>
             <a:endParaRPr kumimoji="1" lang="ja-JP" altLang="en-US"/>
           </a:p>
@@ -3211,7 +3211,7 @@
           <a:p>
             <a:fld id="{E9CC885B-4903-4D54-9A93-00025F12DED9}" type="datetimeFigureOut">
               <a:rPr kumimoji="1" lang="ja-JP" altLang="en-US" smtClean="0"/>
-              <a:t>2024/9/4</a:t>
+              <a:t>2025/1/6</a:t>
             </a:fld>
             <a:endParaRPr kumimoji="1" lang="ja-JP" altLang="en-US"/>
           </a:p>
@@ -4836,6 +4836,110 @@
           </a:prstGeom>
         </p:spPr>
       </p:pic>
+      <p:sp>
+        <p:nvSpPr>
+          <p:cNvPr id="7" name="正方形/長方形 6">
+            <a:extLst>
+              <a:ext uri="{FF2B5EF4-FFF2-40B4-BE49-F238E27FC236}">
+                <a16:creationId xmlns:a16="http://schemas.microsoft.com/office/drawing/2014/main" id="{0DEA20C4-3625-4182-BB6D-03C6E5FC194E}"/>
+              </a:ext>
+            </a:extLst>
+          </p:cNvPr>
+          <p:cNvSpPr/>
+          <p:nvPr/>
+        </p:nvSpPr>
+        <p:spPr>
+          <a:xfrm>
+            <a:off x="1412429" y="2117188"/>
+            <a:ext cx="6419238" cy="1159411"/>
+          </a:xfrm>
+          <a:prstGeom prst="rect">
+            <a:avLst/>
+          </a:prstGeom>
+          <a:noFill/>
+          <a:ln w="38100">
+            <a:solidFill>
+              <a:srgbClr val="FF0000"/>
+            </a:solidFill>
+          </a:ln>
+        </p:spPr>
+        <p:style>
+          <a:lnRef idx="2">
+            <a:schemeClr val="accent1">
+              <a:shade val="50000"/>
+            </a:schemeClr>
+          </a:lnRef>
+          <a:fillRef idx="1">
+            <a:schemeClr val="accent1"/>
+          </a:fillRef>
+          <a:effectRef idx="0">
+            <a:schemeClr val="accent1"/>
+          </a:effectRef>
+          <a:fontRef idx="minor">
+            <a:schemeClr val="lt1"/>
+          </a:fontRef>
+        </p:style>
+        <p:txBody>
+          <a:bodyPr rtlCol="0" anchor="ctr"/>
+          <a:lstStyle/>
+          <a:p>
+            <a:pPr algn="ctr"/>
+            <a:endParaRPr kumimoji="1" lang="ja-JP" altLang="en-US"/>
+          </a:p>
+        </p:txBody>
+      </p:sp>
+      <p:sp>
+        <p:nvSpPr>
+          <p:cNvPr id="8" name="正方形/長方形 7">
+            <a:extLst>
+              <a:ext uri="{FF2B5EF4-FFF2-40B4-BE49-F238E27FC236}">
+                <a16:creationId xmlns:a16="http://schemas.microsoft.com/office/drawing/2014/main" id="{0276699F-8B2A-43F4-8D9B-48ED46B3EE97}"/>
+              </a:ext>
+            </a:extLst>
+          </p:cNvPr>
+          <p:cNvSpPr/>
+          <p:nvPr/>
+        </p:nvSpPr>
+        <p:spPr>
+          <a:xfrm>
+            <a:off x="1850186" y="4783667"/>
+            <a:ext cx="6938578" cy="601134"/>
+          </a:xfrm>
+          <a:prstGeom prst="rect">
+            <a:avLst/>
+          </a:prstGeom>
+          <a:noFill/>
+          <a:ln w="38100">
+            <a:solidFill>
+              <a:srgbClr val="FF0000"/>
+            </a:solidFill>
+          </a:ln>
+        </p:spPr>
+        <p:style>
+          <a:lnRef idx="2">
+            <a:schemeClr val="accent1">
+              <a:shade val="50000"/>
+            </a:schemeClr>
+          </a:lnRef>
+          <a:fillRef idx="1">
+            <a:schemeClr val="accent1"/>
+          </a:fillRef>
+          <a:effectRef idx="0">
+            <a:schemeClr val="accent1"/>
+          </a:effectRef>
+          <a:fontRef idx="minor">
+            <a:schemeClr val="lt1"/>
+          </a:fontRef>
+        </p:style>
+        <p:txBody>
+          <a:bodyPr rtlCol="0" anchor="ctr"/>
+          <a:lstStyle/>
+          <a:p>
+            <a:pPr algn="ctr"/>
+            <a:endParaRPr kumimoji="1" lang="ja-JP" altLang="en-US"/>
+          </a:p>
+        </p:txBody>
+      </p:sp>
     </p:spTree>
     <p:extLst>
       <p:ext uri="{BB962C8B-B14F-4D97-AF65-F5344CB8AC3E}">
@@ -5605,12 +5709,87 @@
           </a:p>
         </p:txBody>
       </p:sp>
+      <p:sp>
+        <p:nvSpPr>
+          <p:cNvPr id="7" name="テキスト ボックス 6">
+            <a:extLst>
+              <a:ext uri="{FF2B5EF4-FFF2-40B4-BE49-F238E27FC236}">
+                <a16:creationId xmlns:a16="http://schemas.microsoft.com/office/drawing/2014/main" id="{A3B7CE09-5C42-4683-948C-7D6B3C24832A}"/>
+              </a:ext>
+            </a:extLst>
+          </p:cNvPr>
+          <p:cNvSpPr txBox="1"/>
+          <p:nvPr/>
+        </p:nvSpPr>
+        <p:spPr>
+          <a:xfrm>
+            <a:off x="567542" y="4348603"/>
+            <a:ext cx="7127272" cy="830997"/>
+          </a:xfrm>
+          <a:prstGeom prst="rect">
+            <a:avLst/>
+          </a:prstGeom>
+          <a:noFill/>
+        </p:spPr>
+        <p:txBody>
+          <a:bodyPr wrap="none" rtlCol="0">
+            <a:spAutoFit/>
+          </a:bodyPr>
+          <a:lstStyle/>
+          <a:p>
+            <a:r>
+              <a:rPr kumimoji="1" lang="ja-JP" altLang="en-US" sz="2400" b="1" dirty="0">
+                <a:solidFill>
+                  <a:srgbClr val="FF0000"/>
+                </a:solidFill>
+              </a:rPr>
+              <a:t>画像読み込みは</a:t>
+            </a:r>
+            <a:r>
+              <a:rPr kumimoji="1" lang="en-US" altLang="ja-JP" sz="2400" b="1" dirty="0">
+                <a:solidFill>
+                  <a:srgbClr val="FF0000"/>
+                </a:solidFill>
+              </a:rPr>
+              <a:t>1</a:t>
+            </a:r>
+            <a:r>
+              <a:rPr kumimoji="1" lang="ja-JP" altLang="en-US" sz="2400" b="1" dirty="0">
+                <a:solidFill>
+                  <a:srgbClr val="FF0000"/>
+                </a:solidFill>
+              </a:rPr>
+              <a:t>度だけ呼び出すもの</a:t>
+            </a:r>
+            <a:r>
+              <a:rPr kumimoji="1" lang="ja-JP" altLang="en-US" sz="2400" dirty="0"/>
+              <a:t>になるので、</a:t>
+            </a:r>
+            <a:endParaRPr kumimoji="1" lang="en-US" altLang="ja-JP" sz="2400" dirty="0"/>
+          </a:p>
+          <a:p>
+            <a:r>
+              <a:rPr lang="ja-JP" altLang="en-US" sz="2400" b="1" dirty="0">
+                <a:solidFill>
+                  <a:srgbClr val="FF0000"/>
+                </a:solidFill>
+              </a:rPr>
+              <a:t>初期化処理</a:t>
+            </a:r>
+            <a:r>
+              <a:rPr lang="ja-JP" altLang="en-US" sz="2400" dirty="0"/>
+              <a:t>で行います。</a:t>
+            </a:r>
+            <a:endParaRPr kumimoji="1" lang="en-US" altLang="ja-JP" sz="2400" dirty="0"/>
+          </a:p>
+        </p:txBody>
+      </p:sp>
       <p:pic>
         <p:nvPicPr>
-          <p:cNvPr id="3" name="図 2">
-            <a:extLst>
-              <a:ext uri="{FF2B5EF4-FFF2-40B4-BE49-F238E27FC236}">
-                <a16:creationId xmlns:a16="http://schemas.microsoft.com/office/drawing/2014/main" id="{8B3BAD97-ABC5-4D8B-A032-BEB093CFBAFB}"/>
+          <p:cNvPr id="5" name="図 4">
+            <a:extLst>
+              <a:ext uri="{FF2B5EF4-FFF2-40B4-BE49-F238E27FC236}">
+                <a16:creationId xmlns:a16="http://schemas.microsoft.com/office/drawing/2014/main" id="{1E75E0D2-15CB-48E8-808D-55480AA21223}"/>
               </a:ext>
             </a:extLst>
           </p:cNvPr>
@@ -5620,21 +5799,15 @@
           <p:nvPr/>
         </p:nvPicPr>
         <p:blipFill>
-          <a:blip r:embed="rId2">
-            <a:extLst>
-              <a:ext uri="{28A0092B-C50C-407E-A947-70E740481C1C}">
-                <a14:useLocalDpi xmlns:a14="http://schemas.microsoft.com/office/drawing/2010/main" val="0"/>
-              </a:ext>
-            </a:extLst>
-          </a:blip>
+          <a:blip r:embed="rId2"/>
           <a:stretch>
             <a:fillRect/>
           </a:stretch>
         </p:blipFill>
         <p:spPr>
           <a:xfrm>
-            <a:off x="567542" y="1817794"/>
-            <a:ext cx="6849431" cy="2391109"/>
+            <a:off x="567542" y="1817793"/>
+            <a:ext cx="6016242" cy="2313939"/>
           </a:xfrm>
           <a:prstGeom prst="rect">
             <a:avLst/>
@@ -5643,76 +5816,105 @@
       </p:pic>
       <p:sp>
         <p:nvSpPr>
-          <p:cNvPr id="7" name="テキスト ボックス 6">
-            <a:extLst>
-              <a:ext uri="{FF2B5EF4-FFF2-40B4-BE49-F238E27FC236}">
-                <a16:creationId xmlns:a16="http://schemas.microsoft.com/office/drawing/2014/main" id="{A3B7CE09-5C42-4683-948C-7D6B3C24832A}"/>
-              </a:ext>
-            </a:extLst>
-          </p:cNvPr>
-          <p:cNvSpPr txBox="1"/>
+          <p:cNvPr id="8" name="正方形/長方形 7">
+            <a:extLst>
+              <a:ext uri="{FF2B5EF4-FFF2-40B4-BE49-F238E27FC236}">
+                <a16:creationId xmlns:a16="http://schemas.microsoft.com/office/drawing/2014/main" id="{C0825B00-BC25-4288-B0E7-CA0A00A99E08}"/>
+              </a:ext>
+            </a:extLst>
+          </p:cNvPr>
+          <p:cNvSpPr/>
           <p:nvPr/>
         </p:nvSpPr>
         <p:spPr>
           <a:xfrm>
-            <a:off x="567542" y="4348603"/>
-            <a:ext cx="7127272" cy="830997"/>
+            <a:off x="1447800" y="1678094"/>
+            <a:ext cx="3530600" cy="717973"/>
           </a:xfrm>
           <a:prstGeom prst="rect">
             <a:avLst/>
           </a:prstGeom>
           <a:noFill/>
-        </p:spPr>
-        <p:txBody>
-          <a:bodyPr wrap="none" rtlCol="0">
-            <a:spAutoFit/>
-          </a:bodyPr>
-          <a:lstStyle/>
-          <a:p>
-            <a:r>
-              <a:rPr kumimoji="1" lang="ja-JP" altLang="en-US" sz="2400" b="1" dirty="0">
-                <a:solidFill>
-                  <a:srgbClr val="FF0000"/>
-                </a:solidFill>
-              </a:rPr>
-              <a:t>画像読み込みは</a:t>
-            </a:r>
-            <a:r>
-              <a:rPr kumimoji="1" lang="en-US" altLang="ja-JP" sz="2400" b="1" dirty="0">
-                <a:solidFill>
-                  <a:srgbClr val="FF0000"/>
-                </a:solidFill>
-              </a:rPr>
-              <a:t>1</a:t>
-            </a:r>
-            <a:r>
-              <a:rPr kumimoji="1" lang="ja-JP" altLang="en-US" sz="2400" b="1" dirty="0">
-                <a:solidFill>
-                  <a:srgbClr val="FF0000"/>
-                </a:solidFill>
-              </a:rPr>
-              <a:t>度だけ呼び出すもの</a:t>
-            </a:r>
-            <a:r>
-              <a:rPr kumimoji="1" lang="ja-JP" altLang="en-US" sz="2400" dirty="0"/>
-              <a:t>になるので、</a:t>
-            </a:r>
-            <a:endParaRPr kumimoji="1" lang="en-US" altLang="ja-JP" sz="2400" dirty="0"/>
-          </a:p>
-          <a:p>
-            <a:r>
-              <a:rPr lang="ja-JP" altLang="en-US" sz="2400" b="1" dirty="0">
-                <a:solidFill>
-                  <a:srgbClr val="FF0000"/>
-                </a:solidFill>
-              </a:rPr>
-              <a:t>初期化処理</a:t>
-            </a:r>
-            <a:r>
-              <a:rPr lang="ja-JP" altLang="en-US" sz="2400" dirty="0"/>
-              <a:t>で行います。</a:t>
-            </a:r>
-            <a:endParaRPr kumimoji="1" lang="en-US" altLang="ja-JP" sz="2400" dirty="0"/>
+          <a:ln w="38100">
+            <a:solidFill>
+              <a:srgbClr val="FF0000"/>
+            </a:solidFill>
+          </a:ln>
+        </p:spPr>
+        <p:style>
+          <a:lnRef idx="2">
+            <a:schemeClr val="accent1">
+              <a:shade val="50000"/>
+            </a:schemeClr>
+          </a:lnRef>
+          <a:fillRef idx="1">
+            <a:schemeClr val="accent1"/>
+          </a:fillRef>
+          <a:effectRef idx="0">
+            <a:schemeClr val="accent1"/>
+          </a:effectRef>
+          <a:fontRef idx="minor">
+            <a:schemeClr val="lt1"/>
+          </a:fontRef>
+        </p:style>
+        <p:txBody>
+          <a:bodyPr rtlCol="0" anchor="ctr"/>
+          <a:lstStyle/>
+          <a:p>
+            <a:pPr algn="ctr"/>
+            <a:endParaRPr kumimoji="1" lang="ja-JP" altLang="en-US"/>
+          </a:p>
+        </p:txBody>
+      </p:sp>
+      <p:sp>
+        <p:nvSpPr>
+          <p:cNvPr id="9" name="正方形/長方形 8">
+            <a:extLst>
+              <a:ext uri="{FF2B5EF4-FFF2-40B4-BE49-F238E27FC236}">
+                <a16:creationId xmlns:a16="http://schemas.microsoft.com/office/drawing/2014/main" id="{C83B0E31-A28D-42D2-97B7-37F33FCB904B}"/>
+              </a:ext>
+            </a:extLst>
+          </p:cNvPr>
+          <p:cNvSpPr/>
+          <p:nvPr/>
+        </p:nvSpPr>
+        <p:spPr>
+          <a:xfrm>
+            <a:off x="1810363" y="3269827"/>
+            <a:ext cx="4937570" cy="717973"/>
+          </a:xfrm>
+          <a:prstGeom prst="rect">
+            <a:avLst/>
+          </a:prstGeom>
+          <a:noFill/>
+          <a:ln w="38100">
+            <a:solidFill>
+              <a:srgbClr val="FF0000"/>
+            </a:solidFill>
+          </a:ln>
+        </p:spPr>
+        <p:style>
+          <a:lnRef idx="2">
+            <a:schemeClr val="accent1">
+              <a:shade val="50000"/>
+            </a:schemeClr>
+          </a:lnRef>
+          <a:fillRef idx="1">
+            <a:schemeClr val="accent1"/>
+          </a:fillRef>
+          <a:effectRef idx="0">
+            <a:schemeClr val="accent1"/>
+          </a:effectRef>
+          <a:fontRef idx="minor">
+            <a:schemeClr val="lt1"/>
+          </a:fontRef>
+        </p:style>
+        <p:txBody>
+          <a:bodyPr rtlCol="0" anchor="ctr"/>
+          <a:lstStyle/>
+          <a:p>
+            <a:pPr algn="ctr"/>
+            <a:endParaRPr kumimoji="1" lang="ja-JP" altLang="en-US"/>
           </a:p>
         </p:txBody>
       </p:sp>
@@ -5974,10 +6176,10 @@
       </p:sp>
       <p:pic>
         <p:nvPicPr>
-          <p:cNvPr id="5" name="図 4">
-            <a:extLst>
-              <a:ext uri="{FF2B5EF4-FFF2-40B4-BE49-F238E27FC236}">
-                <a16:creationId xmlns:a16="http://schemas.microsoft.com/office/drawing/2014/main" id="{8783D42C-84F2-47CC-94BB-DAFD54FF7E09}"/>
+          <p:cNvPr id="3" name="図 2">
+            <a:extLst>
+              <a:ext uri="{FF2B5EF4-FFF2-40B4-BE49-F238E27FC236}">
+                <a16:creationId xmlns:a16="http://schemas.microsoft.com/office/drawing/2014/main" id="{512BD090-AFB7-4307-953D-49CFB00D13B1}"/>
               </a:ext>
             </a:extLst>
           </p:cNvPr>
@@ -5987,21 +6189,15 @@
           <p:nvPr/>
         </p:nvPicPr>
         <p:blipFill>
-          <a:blip r:embed="rId2">
-            <a:extLst>
-              <a:ext uri="{28A0092B-C50C-407E-A947-70E740481C1C}">
-                <a14:useLocalDpi xmlns:a14="http://schemas.microsoft.com/office/drawing/2010/main" val="0"/>
-              </a:ext>
-            </a:extLst>
-          </a:blip>
+          <a:blip r:embed="rId2"/>
           <a:stretch>
             <a:fillRect/>
           </a:stretch>
         </p:blipFill>
         <p:spPr>
           <a:xfrm>
-            <a:off x="567541" y="1817794"/>
-            <a:ext cx="9970337" cy="1192106"/>
+            <a:off x="571751" y="1678094"/>
+            <a:ext cx="8522538" cy="1217506"/>
           </a:xfrm>
           <a:prstGeom prst="rect">
             <a:avLst/>
@@ -6162,6 +6358,58 @@
           </a:prstGeom>
         </p:spPr>
       </p:pic>
+      <p:sp>
+        <p:nvSpPr>
+          <p:cNvPr id="7" name="正方形/長方形 6">
+            <a:extLst>
+              <a:ext uri="{FF2B5EF4-FFF2-40B4-BE49-F238E27FC236}">
+                <a16:creationId xmlns:a16="http://schemas.microsoft.com/office/drawing/2014/main" id="{B21E472B-0514-4879-9E8E-11488DA2C53E}"/>
+              </a:ext>
+            </a:extLst>
+          </p:cNvPr>
+          <p:cNvSpPr/>
+          <p:nvPr/>
+        </p:nvSpPr>
+        <p:spPr>
+          <a:xfrm>
+            <a:off x="2394562" y="2985347"/>
+            <a:ext cx="5655933" cy="993986"/>
+          </a:xfrm>
+          <a:prstGeom prst="rect">
+            <a:avLst/>
+          </a:prstGeom>
+          <a:noFill/>
+          <a:ln w="38100">
+            <a:solidFill>
+              <a:srgbClr val="FF0000"/>
+            </a:solidFill>
+          </a:ln>
+        </p:spPr>
+        <p:style>
+          <a:lnRef idx="2">
+            <a:schemeClr val="accent1">
+              <a:shade val="50000"/>
+            </a:schemeClr>
+          </a:lnRef>
+          <a:fillRef idx="1">
+            <a:schemeClr val="accent1"/>
+          </a:fillRef>
+          <a:effectRef idx="0">
+            <a:schemeClr val="accent1"/>
+          </a:effectRef>
+          <a:fontRef idx="minor">
+            <a:schemeClr val="lt1"/>
+          </a:fontRef>
+        </p:style>
+        <p:txBody>
+          <a:bodyPr rtlCol="0" anchor="ctr"/>
+          <a:lstStyle/>
+          <a:p>
+            <a:pPr algn="ctr"/>
+            <a:endParaRPr kumimoji="1" lang="ja-JP" altLang="en-US"/>
+          </a:p>
+        </p:txBody>
+      </p:sp>
     </p:spTree>
     <p:extLst>
       <p:ext uri="{BB962C8B-B14F-4D97-AF65-F5344CB8AC3E}">
@@ -7075,6 +7323,58 @@
           </a:prstGeom>
         </p:spPr>
       </p:pic>
+      <p:sp>
+        <p:nvSpPr>
+          <p:cNvPr id="5" name="正方形/長方形 4">
+            <a:extLst>
+              <a:ext uri="{FF2B5EF4-FFF2-40B4-BE49-F238E27FC236}">
+                <a16:creationId xmlns:a16="http://schemas.microsoft.com/office/drawing/2014/main" id="{18E4393C-99D8-482C-A98B-31D47CEFFAF1}"/>
+              </a:ext>
+            </a:extLst>
+          </p:cNvPr>
+          <p:cNvSpPr/>
+          <p:nvPr/>
+        </p:nvSpPr>
+        <p:spPr>
+          <a:xfrm>
+            <a:off x="1734162" y="2717800"/>
+            <a:ext cx="3413571" cy="601134"/>
+          </a:xfrm>
+          <a:prstGeom prst="rect">
+            <a:avLst/>
+          </a:prstGeom>
+          <a:noFill/>
+          <a:ln w="38100">
+            <a:solidFill>
+              <a:srgbClr val="FF0000"/>
+            </a:solidFill>
+          </a:ln>
+        </p:spPr>
+        <p:style>
+          <a:lnRef idx="2">
+            <a:schemeClr val="accent1">
+              <a:shade val="50000"/>
+            </a:schemeClr>
+          </a:lnRef>
+          <a:fillRef idx="1">
+            <a:schemeClr val="accent1"/>
+          </a:fillRef>
+          <a:effectRef idx="0">
+            <a:schemeClr val="accent1"/>
+          </a:effectRef>
+          <a:fontRef idx="minor">
+            <a:schemeClr val="lt1"/>
+          </a:fontRef>
+        </p:style>
+        <p:txBody>
+          <a:bodyPr rtlCol="0" anchor="ctr"/>
+          <a:lstStyle/>
+          <a:p>
+            <a:pPr algn="ctr"/>
+            <a:endParaRPr kumimoji="1" lang="ja-JP" altLang="en-US"/>
+          </a:p>
+        </p:txBody>
+      </p:sp>
     </p:spTree>
     <p:extLst>
       <p:ext uri="{BB962C8B-B14F-4D97-AF65-F5344CB8AC3E}">

--- a/ゲーム科1年/00_前期/ゲームプログラミングⅠ/04_画像処理.pptx
+++ b/ゲーム科1年/00_前期/ゲームプログラミングⅠ/04_画像処理.pptx
@@ -273,7 +273,7 @@
           <a:p>
             <a:fld id="{E9CC885B-4903-4D54-9A93-00025F12DED9}" type="datetimeFigureOut">
               <a:rPr kumimoji="1" lang="ja-JP" altLang="en-US" smtClean="0"/>
-              <a:t>2025/1/6</a:t>
+              <a:t>2025/3/3</a:t>
             </a:fld>
             <a:endParaRPr kumimoji="1" lang="ja-JP" altLang="en-US"/>
           </a:p>
@@ -503,7 +503,7 @@
           <a:p>
             <a:fld id="{E9CC885B-4903-4D54-9A93-00025F12DED9}" type="datetimeFigureOut">
               <a:rPr kumimoji="1" lang="ja-JP" altLang="en-US" smtClean="0"/>
-              <a:t>2025/1/6</a:t>
+              <a:t>2025/3/3</a:t>
             </a:fld>
             <a:endParaRPr kumimoji="1" lang="ja-JP" altLang="en-US"/>
           </a:p>
@@ -743,7 +743,7 @@
           <a:p>
             <a:fld id="{E9CC885B-4903-4D54-9A93-00025F12DED9}" type="datetimeFigureOut">
               <a:rPr kumimoji="1" lang="ja-JP" altLang="en-US" smtClean="0"/>
-              <a:t>2025/1/6</a:t>
+              <a:t>2025/3/3</a:t>
             </a:fld>
             <a:endParaRPr kumimoji="1" lang="ja-JP" altLang="en-US"/>
           </a:p>
@@ -973,7 +973,7 @@
           <a:p>
             <a:fld id="{E9CC885B-4903-4D54-9A93-00025F12DED9}" type="datetimeFigureOut">
               <a:rPr kumimoji="1" lang="ja-JP" altLang="en-US" smtClean="0"/>
-              <a:t>2025/1/6</a:t>
+              <a:t>2025/3/3</a:t>
             </a:fld>
             <a:endParaRPr kumimoji="1" lang="ja-JP" altLang="en-US"/>
           </a:p>
@@ -1248,7 +1248,7 @@
           <a:p>
             <a:fld id="{E9CC885B-4903-4D54-9A93-00025F12DED9}" type="datetimeFigureOut">
               <a:rPr kumimoji="1" lang="ja-JP" altLang="en-US" smtClean="0"/>
-              <a:t>2025/1/6</a:t>
+              <a:t>2025/3/3</a:t>
             </a:fld>
             <a:endParaRPr kumimoji="1" lang="ja-JP" altLang="en-US"/>
           </a:p>
@@ -1577,7 +1577,7 @@
           <a:p>
             <a:fld id="{E9CC885B-4903-4D54-9A93-00025F12DED9}" type="datetimeFigureOut">
               <a:rPr kumimoji="1" lang="ja-JP" altLang="en-US" smtClean="0"/>
-              <a:t>2025/1/6</a:t>
+              <a:t>2025/3/3</a:t>
             </a:fld>
             <a:endParaRPr kumimoji="1" lang="ja-JP" altLang="en-US"/>
           </a:p>
@@ -2053,7 +2053,7 @@
           <a:p>
             <a:fld id="{E9CC885B-4903-4D54-9A93-00025F12DED9}" type="datetimeFigureOut">
               <a:rPr kumimoji="1" lang="ja-JP" altLang="en-US" smtClean="0"/>
-              <a:t>2025/1/6</a:t>
+              <a:t>2025/3/3</a:t>
             </a:fld>
             <a:endParaRPr kumimoji="1" lang="ja-JP" altLang="en-US"/>
           </a:p>
@@ -2194,7 +2194,7 @@
           <a:p>
             <a:fld id="{E9CC885B-4903-4D54-9A93-00025F12DED9}" type="datetimeFigureOut">
               <a:rPr kumimoji="1" lang="ja-JP" altLang="en-US" smtClean="0"/>
-              <a:t>2025/1/6</a:t>
+              <a:t>2025/3/3</a:t>
             </a:fld>
             <a:endParaRPr kumimoji="1" lang="ja-JP" altLang="en-US"/>
           </a:p>
@@ -2307,7 +2307,7 @@
           <a:p>
             <a:fld id="{E9CC885B-4903-4D54-9A93-00025F12DED9}" type="datetimeFigureOut">
               <a:rPr kumimoji="1" lang="ja-JP" altLang="en-US" smtClean="0"/>
-              <a:t>2025/1/6</a:t>
+              <a:t>2025/3/3</a:t>
             </a:fld>
             <a:endParaRPr kumimoji="1" lang="ja-JP" altLang="en-US"/>
           </a:p>
@@ -2650,7 +2650,7 @@
           <a:p>
             <a:fld id="{E9CC885B-4903-4D54-9A93-00025F12DED9}" type="datetimeFigureOut">
               <a:rPr kumimoji="1" lang="ja-JP" altLang="en-US" smtClean="0"/>
-              <a:t>2025/1/6</a:t>
+              <a:t>2025/3/3</a:t>
             </a:fld>
             <a:endParaRPr kumimoji="1" lang="ja-JP" altLang="en-US"/>
           </a:p>
@@ -2938,7 +2938,7 @@
           <a:p>
             <a:fld id="{E9CC885B-4903-4D54-9A93-00025F12DED9}" type="datetimeFigureOut">
               <a:rPr kumimoji="1" lang="ja-JP" altLang="en-US" smtClean="0"/>
-              <a:t>2025/1/6</a:t>
+              <a:t>2025/3/3</a:t>
             </a:fld>
             <a:endParaRPr kumimoji="1" lang="ja-JP" altLang="en-US"/>
           </a:p>
@@ -3211,7 +3211,7 @@
           <a:p>
             <a:fld id="{E9CC885B-4903-4D54-9A93-00025F12DED9}" type="datetimeFigureOut">
               <a:rPr kumimoji="1" lang="ja-JP" altLang="en-US" smtClean="0"/>
-              <a:t>2025/1/6</a:t>
+              <a:t>2025/3/3</a:t>
             </a:fld>
             <a:endParaRPr kumimoji="1" lang="ja-JP" altLang="en-US"/>
           </a:p>

--- a/ゲーム科1年/00_前期/ゲームプログラミングⅠ/04_画像処理.pptx
+++ b/ゲーム科1年/00_前期/ゲームプログラミングⅠ/04_画像処理.pptx
@@ -273,7 +273,7 @@
           <a:p>
             <a:fld id="{E9CC885B-4903-4D54-9A93-00025F12DED9}" type="datetimeFigureOut">
               <a:rPr kumimoji="1" lang="ja-JP" altLang="en-US" smtClean="0"/>
-              <a:t>2025/3/3</a:t>
+              <a:t>2026/6/4</a:t>
             </a:fld>
             <a:endParaRPr kumimoji="1" lang="ja-JP" altLang="en-US"/>
           </a:p>
@@ -503,7 +503,7 @@
           <a:p>
             <a:fld id="{E9CC885B-4903-4D54-9A93-00025F12DED9}" type="datetimeFigureOut">
               <a:rPr kumimoji="1" lang="ja-JP" altLang="en-US" smtClean="0"/>
-              <a:t>2025/3/3</a:t>
+              <a:t>2026/6/4</a:t>
             </a:fld>
             <a:endParaRPr kumimoji="1" lang="ja-JP" altLang="en-US"/>
           </a:p>
@@ -743,7 +743,7 @@
           <a:p>
             <a:fld id="{E9CC885B-4903-4D54-9A93-00025F12DED9}" type="datetimeFigureOut">
               <a:rPr kumimoji="1" lang="ja-JP" altLang="en-US" smtClean="0"/>
-              <a:t>2025/3/3</a:t>
+              <a:t>2026/6/4</a:t>
             </a:fld>
             <a:endParaRPr kumimoji="1" lang="ja-JP" altLang="en-US"/>
           </a:p>
@@ -973,7 +973,7 @@
           <a:p>
             <a:fld id="{E9CC885B-4903-4D54-9A93-00025F12DED9}" type="datetimeFigureOut">
               <a:rPr kumimoji="1" lang="ja-JP" altLang="en-US" smtClean="0"/>
-              <a:t>2025/3/3</a:t>
+              <a:t>2026/6/4</a:t>
             </a:fld>
             <a:endParaRPr kumimoji="1" lang="ja-JP" altLang="en-US"/>
           </a:p>
@@ -1248,7 +1248,7 @@
           <a:p>
             <a:fld id="{E9CC885B-4903-4D54-9A93-00025F12DED9}" type="datetimeFigureOut">
               <a:rPr kumimoji="1" lang="ja-JP" altLang="en-US" smtClean="0"/>
-              <a:t>2025/3/3</a:t>
+              <a:t>2026/6/4</a:t>
             </a:fld>
             <a:endParaRPr kumimoji="1" lang="ja-JP" altLang="en-US"/>
           </a:p>
@@ -1577,7 +1577,7 @@
           <a:p>
             <a:fld id="{E9CC885B-4903-4D54-9A93-00025F12DED9}" type="datetimeFigureOut">
               <a:rPr kumimoji="1" lang="ja-JP" altLang="en-US" smtClean="0"/>
-              <a:t>2025/3/3</a:t>
+              <a:t>2026/6/4</a:t>
             </a:fld>
             <a:endParaRPr kumimoji="1" lang="ja-JP" altLang="en-US"/>
           </a:p>
@@ -2053,7 +2053,7 @@
           <a:p>
             <a:fld id="{E9CC885B-4903-4D54-9A93-00025F12DED9}" type="datetimeFigureOut">
               <a:rPr kumimoji="1" lang="ja-JP" altLang="en-US" smtClean="0"/>
-              <a:t>2025/3/3</a:t>
+              <a:t>2026/6/4</a:t>
             </a:fld>
             <a:endParaRPr kumimoji="1" lang="ja-JP" altLang="en-US"/>
           </a:p>
@@ -2194,7 +2194,7 @@
           <a:p>
             <a:fld id="{E9CC885B-4903-4D54-9A93-00025F12DED9}" type="datetimeFigureOut">
               <a:rPr kumimoji="1" lang="ja-JP" altLang="en-US" smtClean="0"/>
-              <a:t>2025/3/3</a:t>
+              <a:t>2026/6/4</a:t>
             </a:fld>
             <a:endParaRPr kumimoji="1" lang="ja-JP" altLang="en-US"/>
           </a:p>
@@ -2307,7 +2307,7 @@
           <a:p>
             <a:fld id="{E9CC885B-4903-4D54-9A93-00025F12DED9}" type="datetimeFigureOut">
               <a:rPr kumimoji="1" lang="ja-JP" altLang="en-US" smtClean="0"/>
-              <a:t>2025/3/3</a:t>
+              <a:t>2026/6/4</a:t>
             </a:fld>
             <a:endParaRPr kumimoji="1" lang="ja-JP" altLang="en-US"/>
           </a:p>
@@ -2650,7 +2650,7 @@
           <a:p>
             <a:fld id="{E9CC885B-4903-4D54-9A93-00025F12DED9}" type="datetimeFigureOut">
               <a:rPr kumimoji="1" lang="ja-JP" altLang="en-US" smtClean="0"/>
-              <a:t>2025/3/3</a:t>
+              <a:t>2026/6/4</a:t>
             </a:fld>
             <a:endParaRPr kumimoji="1" lang="ja-JP" altLang="en-US"/>
           </a:p>
@@ -2938,7 +2938,7 @@
           <a:p>
             <a:fld id="{E9CC885B-4903-4D54-9A93-00025F12DED9}" type="datetimeFigureOut">
               <a:rPr kumimoji="1" lang="ja-JP" altLang="en-US" smtClean="0"/>
-              <a:t>2025/3/3</a:t>
+              <a:t>2026/6/4</a:t>
             </a:fld>
             <a:endParaRPr kumimoji="1" lang="ja-JP" altLang="en-US"/>
           </a:p>
@@ -3211,7 +3211,7 @@
           <a:p>
             <a:fld id="{E9CC885B-4903-4D54-9A93-00025F12DED9}" type="datetimeFigureOut">
               <a:rPr kumimoji="1" lang="ja-JP" altLang="en-US" smtClean="0"/>
-              <a:t>2025/3/3</a:t>
+              <a:t>2026/6/4</a:t>
             </a:fld>
             <a:endParaRPr kumimoji="1" lang="ja-JP" altLang="en-US"/>
           </a:p>
@@ -6928,10 +6928,10 @@
         </p:nvGrpSpPr>
         <p:grpSpPr>
           <a:xfrm>
-            <a:off x="305453" y="2047426"/>
-            <a:ext cx="9557701" cy="4766162"/>
-            <a:chOff x="-88247" y="2058203"/>
-            <a:chExt cx="9557701" cy="4766162"/>
+            <a:off x="305453" y="2061550"/>
+            <a:ext cx="9557701" cy="4752038"/>
+            <a:chOff x="-88247" y="2072327"/>
+            <a:chExt cx="9557701" cy="4752038"/>
           </a:xfrm>
         </p:grpSpPr>
         <p:pic>
@@ -7005,50 +7005,6 @@
               <a:r>
                 <a:rPr kumimoji="1" lang="en-US" altLang="ja-JP" sz="2400" dirty="0"/>
                 <a:t>0, 0</a:t>
-              </a:r>
-              <a:r>
-                <a:rPr kumimoji="1" lang="ja-JP" altLang="en-US" sz="2400" dirty="0"/>
-                <a:t>）</a:t>
-              </a:r>
-              <a:endParaRPr kumimoji="1" lang="en-US" altLang="ja-JP" sz="2400" dirty="0"/>
-            </a:p>
-          </p:txBody>
-        </p:sp>
-        <p:sp>
-          <p:nvSpPr>
-            <p:cNvPr id="10" name="テキスト ボックス 9">
-              <a:extLst>
-                <a:ext uri="{FF2B5EF4-FFF2-40B4-BE49-F238E27FC236}">
-                  <a16:creationId xmlns:a16="http://schemas.microsoft.com/office/drawing/2014/main" id="{47FED139-869D-4296-877A-DF336AACF7B3}"/>
-                </a:ext>
-              </a:extLst>
-            </p:cNvPr>
-            <p:cNvSpPr txBox="1"/>
-            <p:nvPr/>
-          </p:nvSpPr>
-          <p:spPr>
-            <a:xfrm>
-              <a:off x="7087253" y="2058203"/>
-              <a:ext cx="1826141" cy="461665"/>
-            </a:xfrm>
-            <a:prstGeom prst="rect">
-              <a:avLst/>
-            </a:prstGeom>
-            <a:noFill/>
-          </p:spPr>
-          <p:txBody>
-            <a:bodyPr wrap="none" rtlCol="0">
-              <a:spAutoFit/>
-            </a:bodyPr>
-            <a:lstStyle/>
-            <a:p>
-              <a:r>
-                <a:rPr kumimoji="1" lang="ja-JP" altLang="en-US" sz="2400" dirty="0"/>
-                <a:t>（</a:t>
-              </a:r>
-              <a:r>
-                <a:rPr kumimoji="1" lang="en-US" altLang="ja-JP" sz="2400" dirty="0"/>
-                <a:t>1920, 0</a:t>
               </a:r>
               <a:r>
                 <a:rPr kumimoji="1" lang="ja-JP" altLang="en-US" sz="2400" dirty="0"/>
